--- a/research/ai-native-sdlc/AI原生SDLC_給Sam三頁版.pptx
+++ b/research/ai-native-sdlc/AI原生SDLC_給Sam三頁版.pptx
@@ -46554,7 +46554,7 @@
                 <a:latin typeface="Arial"/>
                 <a:ea typeface="微軟正黑體"/>
               </a:rPr>
-              <a:t>推案前：客戶若同時是所內審計客戶，先與 Risk &amp; Quality 確認獨立性。完整說明與術語對照見 16 頁完整版。</a:t>
+              <a:t>推案前：客戶若同時是所內審計客戶，先與 Risk &amp; Quality 確認獨立性。完整說明、服務模組與術語對照見 23 頁完整版。</a:t>
             </a:r>
           </a:p>
         </p:txBody>

--- a/research/ai-native-sdlc/AI原生SDLC_給Sam三頁版.pptx
+++ b/research/ai-native-sdlc/AI原生SDLC_給Sam三頁版.pptx
@@ -46554,7 +46554,7 @@
                 <a:latin typeface="Arial"/>
                 <a:ea typeface="微軟正黑體"/>
               </a:rPr>
-              <a:t>推案前：客戶若同時是所內審計客戶，先與 Risk &amp; Quality 確認獨立性。完整說明、服務模組與術語對照見 23 頁完整版。</a:t>
+              <a:t>推案前：客戶若同時是所內審計客戶，先與 Risk &amp; Quality 確認獨立性。完整說明、法規、服務模組與術語對照見 25 頁完整版。</a:t>
             </a:r>
           </a:p>
         </p:txBody>

--- a/research/ai-native-sdlc/AI原生SDLC_給Sam三頁版.pptx
+++ b/research/ai-native-sdlc/AI原生SDLC_給Sam三頁版.pptx
@@ -46554,7 +46554,7 @@
                 <a:latin typeface="Arial"/>
                 <a:ea typeface="微軟正黑體"/>
               </a:rPr>
-              <a:t>推案前：客戶若同時是所內審計客戶，先與 Risk &amp; Quality 確認獨立性。完整說明、法規、服務模組與術語對照見 25 頁完整版。</a:t>
+              <a:t>推案前：客戶若同時是所內審計客戶，先與 Risk &amp; Quality 確認獨立性。完整說明、法規、服務模組與術語對照見 32 頁完整版。</a:t>
             </a:r>
           </a:p>
         </p:txBody>
